--- a/public/fun/pack/pptx/weddingpro/결혼식프리미엄_49_오시는길중심_스노우포레스트.pptx
+++ b/public/fun/pack/pptx/weddingpro/결혼식프리미엄_49_오시는길중심_스노우포레스트.pptx
@@ -113,12 +113,12 @@
   <p:extLst>
     <p:ext uri="{521415D9-36F7-43E2-AB2F-B90AF26B5E84}">
       <p14:sectionLst xmlns:p14="http://schemas.microsoft.com/office/powerpoint/2010/main">
-        <p14:section name="시작" id="{B5362059-7F63-4599-9E47-AC56E63E9567}">
+        <p14:section name="시작" id="{BE605557-929C-446C-A5FB-84D99C74AC83}">
           <p14:sldIdLst>
             <p14:sldId id="256"/>
           </p14:sldIdLst>
         </p14:section>
-        <p14:section name="본문" id="{EE60943E-053D-42C8-A060-6E47BD5830AC}">
+        <p14:section name="본문" id="{B4F9BAE3-488E-4976-A82F-E836C2B1F599}">
           <p14:sldIdLst>
             <p14:sldId id="257"/>
             <p14:sldId id="258"/>
@@ -127,7 +127,7 @@
             <p14:sldId id="261"/>
           </p14:sldIdLst>
         </p14:section>
-        <p14:section name="마무리" id="{9CB00FDE-D194-421D-80A1-A6C89E21B428}">
+        <p14:section name="마무리" id="{9C354B22-8141-4165-80BF-12184C9EE7A1}">
           <p14:sldIdLst>
             <p14:sldId id="262"/>
           </p14:sldIdLst>
@@ -3043,7 +3043,7 @@
             </a:lvl1pPr>
           </a:lstStyle>
           <a:p>
-            <a:fld id="{D5DD37FA-42F2-40EA-935A-7B65A83C7114}" type="slidenum">
+            <a:fld id="{8A14E277-DF43-482E-BA60-3DBB5B947D57}" type="slidenum">
               <a:rPr lang="en-US"/>
               <a:t>‹#›</a:t>
             </a:fld>
@@ -5175,7 +5175,7 @@
             </a:lvl1pPr>
           </a:lstStyle>
           <a:p>
-            <a:fld id="{547370B7-698D-41EA-B116-6408DFE69C2E}" type="slidenum">
+            <a:fld id="{A8CF288E-BBAA-4AA8-A820-BB07B89432D2}" type="slidenum">
               <a:rPr lang="en-US"/>
               <a:t>‹#›</a:t>
             </a:fld>
@@ -5812,7 +5812,7 @@
             </a:lvl1pPr>
           </a:lstStyle>
           <a:p>
-            <a:fld id="{D99C5293-B94E-41E1-A61F-FED9087174B3}" type="slidenum">
+            <a:fld id="{2D1F79EF-D372-4C6B-85FE-0018F9E21B2B}" type="slidenum">
               <a:rPr lang="en-US"/>
               <a:t>‹#›</a:t>
             </a:fld>
@@ -6679,7 +6679,7 @@
           <a:p>
             <a:r>
               <a:rPr lang="ko-KR"/>
-              <a:t>0000. 00. 00 · 예식장 이름</a:t>
+              <a:t>날짜 입력 · 예식장 이름</a:t>
             </a:r>
           </a:p>
         </p:txBody>
@@ -6902,7 +6902,7 @@
           <a:bodyPr/>
           <a:lstStyle/>
           <a:p>
-            <a:fld id="{675CB459-210E-42A6-9E67-BC266E2A4C0F}" type="slidenum">
+            <a:fld id="{F511C7DA-56C3-484E-B82C-5C880B2D88FA}" type="slidenum">
               <a:rPr lang="en-US"/>
               <a:t>‹#›</a:t>
             </a:fld>
@@ -7380,7 +7380,7 @@
           <a:bodyPr/>
           <a:lstStyle/>
           <a:p>
-            <a:fld id="{B74B89C8-C16C-42B0-A661-80C03265715D}" type="slidenum">
+            <a:fld id="{E5351650-0049-4EE4-BC53-1F23A7ACD75A}" type="slidenum">
               <a:rPr lang="en-US"/>
               <a:t>‹#›</a:t>
             </a:fld>
@@ -7818,7 +7818,7 @@
           <a:bodyPr/>
           <a:lstStyle/>
           <a:p>
-            <a:fld id="{97E59C1D-2480-46C0-8020-2B3887C85813}" type="slidenum">
+            <a:fld id="{B19EA6B1-E6DE-4FD6-ABB1-D940AF38EFE9}" type="slidenum">
               <a:rPr lang="en-US"/>
               <a:t>‹#›</a:t>
             </a:fld>
@@ -9112,7 +9112,7 @@
           <a:bodyPr/>
           <a:lstStyle/>
           <a:p>
-            <a:fld id="{9A27B81B-7929-4AA0-A6C3-A94E3725FFB0}" type="slidenum">
+            <a:fld id="{A95FDB1B-E4D3-4BE9-9E9C-79C59AF5342C}" type="slidenum">
               <a:rPr lang="en-US"/>
               <a:t>‹#›</a:t>
             </a:fld>
@@ -9200,7 +9200,7 @@
           <a:bodyPr/>
           <a:lstStyle/>
           <a:p>
-            <a:fld id="{96637C58-1CC0-417E-B91B-D2DEFFF1680C}" type="slidenum">
+            <a:fld id="{8D004A8F-FFAE-44A0-919E-DFCEC2588CF6}" type="slidenum">
               <a:rPr lang="en-US"/>
               <a:t>‹#›</a:t>
             </a:fld>
